--- a/intel_IP/HINS/doc/330 imu LPF.pptx
+++ b/intel_IP/HINS/doc/330 imu LPF.pptx
@@ -9,10 +9,11 @@
     <p:sldId id="256" r:id="rId3"/>
     <p:sldId id="257" r:id="rId4"/>
     <p:sldId id="262" r:id="rId5"/>
-    <p:sldId id="261" r:id="rId6"/>
+    <p:sldId id="265" r:id="rId6"/>
     <p:sldId id="263" r:id="rId7"/>
     <p:sldId id="258" r:id="rId8"/>
-    <p:sldId id="264" r:id="rId9"/>
+    <p:sldId id="261" r:id="rId9"/>
+    <p:sldId id="264" r:id="rId10"/>
   </p:sldIdLst>
   <p:sldSz cx="12192000" cy="6858000"/>
   <p:notesSz cx="6858000" cy="9144000"/>
@@ -111,6 +112,11 @@
       </a:defRPr>
     </a:lvl9pPr>
   </p:defaultTextStyle>
+  <p:extLst>
+    <p:ext uri="{EFAFB233-063F-42B5-8137-9DF3F51BA10A}">
+      <p15:sldGuideLst xmlns:p15="http://schemas.microsoft.com/office/powerpoint/2012/main"/>
+    </p:ext>
+  </p:extLst>
 </p:presentation>
 </file>
 
@@ -261,7 +267,7 @@
           <a:p>
             <a:fld id="{CDAEEA1F-7C1B-45EA-B00C-1A924196F87A}" type="datetimeFigureOut">
               <a:rPr lang="zh-TW" altLang="en-US" smtClean="0"/>
-              <a:t>2026/3/3</a:t>
+              <a:t>2026/3/4</a:t>
             </a:fld>
             <a:endParaRPr lang="zh-TW" altLang="en-US"/>
           </a:p>
@@ -459,7 +465,7 @@
           <a:p>
             <a:fld id="{CDAEEA1F-7C1B-45EA-B00C-1A924196F87A}" type="datetimeFigureOut">
               <a:rPr lang="zh-TW" altLang="en-US" smtClean="0"/>
-              <a:t>2026/3/3</a:t>
+              <a:t>2026/3/4</a:t>
             </a:fld>
             <a:endParaRPr lang="zh-TW" altLang="en-US"/>
           </a:p>
@@ -667,7 +673,7 @@
           <a:p>
             <a:fld id="{CDAEEA1F-7C1B-45EA-B00C-1A924196F87A}" type="datetimeFigureOut">
               <a:rPr lang="zh-TW" altLang="en-US" smtClean="0"/>
-              <a:t>2026/3/3</a:t>
+              <a:t>2026/3/4</a:t>
             </a:fld>
             <a:endParaRPr lang="zh-TW" altLang="en-US"/>
           </a:p>
@@ -865,7 +871,7 @@
           <a:p>
             <a:fld id="{CDAEEA1F-7C1B-45EA-B00C-1A924196F87A}" type="datetimeFigureOut">
               <a:rPr lang="zh-TW" altLang="en-US" smtClean="0"/>
-              <a:t>2026/3/3</a:t>
+              <a:t>2026/3/4</a:t>
             </a:fld>
             <a:endParaRPr lang="zh-TW" altLang="en-US"/>
           </a:p>
@@ -1140,7 +1146,7 @@
           <a:p>
             <a:fld id="{CDAEEA1F-7C1B-45EA-B00C-1A924196F87A}" type="datetimeFigureOut">
               <a:rPr lang="zh-TW" altLang="en-US" smtClean="0"/>
-              <a:t>2026/3/3</a:t>
+              <a:t>2026/3/4</a:t>
             </a:fld>
             <a:endParaRPr lang="zh-TW" altLang="en-US"/>
           </a:p>
@@ -1405,7 +1411,7 @@
           <a:p>
             <a:fld id="{CDAEEA1F-7C1B-45EA-B00C-1A924196F87A}" type="datetimeFigureOut">
               <a:rPr lang="zh-TW" altLang="en-US" smtClean="0"/>
-              <a:t>2026/3/3</a:t>
+              <a:t>2026/3/4</a:t>
             </a:fld>
             <a:endParaRPr lang="zh-TW" altLang="en-US"/>
           </a:p>
@@ -1817,7 +1823,7 @@
           <a:p>
             <a:fld id="{CDAEEA1F-7C1B-45EA-B00C-1A924196F87A}" type="datetimeFigureOut">
               <a:rPr lang="zh-TW" altLang="en-US" smtClean="0"/>
-              <a:t>2026/3/3</a:t>
+              <a:t>2026/3/4</a:t>
             </a:fld>
             <a:endParaRPr lang="zh-TW" altLang="en-US"/>
           </a:p>
@@ -1958,7 +1964,7 @@
           <a:p>
             <a:fld id="{CDAEEA1F-7C1B-45EA-B00C-1A924196F87A}" type="datetimeFigureOut">
               <a:rPr lang="zh-TW" altLang="en-US" smtClean="0"/>
-              <a:t>2026/3/3</a:t>
+              <a:t>2026/3/4</a:t>
             </a:fld>
             <a:endParaRPr lang="zh-TW" altLang="en-US"/>
           </a:p>
@@ -2071,7 +2077,7 @@
           <a:p>
             <a:fld id="{CDAEEA1F-7C1B-45EA-B00C-1A924196F87A}" type="datetimeFigureOut">
               <a:rPr lang="zh-TW" altLang="en-US" smtClean="0"/>
-              <a:t>2026/3/3</a:t>
+              <a:t>2026/3/4</a:t>
             </a:fld>
             <a:endParaRPr lang="zh-TW" altLang="en-US"/>
           </a:p>
@@ -2382,7 +2388,7 @@
           <a:p>
             <a:fld id="{CDAEEA1F-7C1B-45EA-B00C-1A924196F87A}" type="datetimeFigureOut">
               <a:rPr lang="zh-TW" altLang="en-US" smtClean="0"/>
-              <a:t>2026/3/3</a:t>
+              <a:t>2026/3/4</a:t>
             </a:fld>
             <a:endParaRPr lang="zh-TW" altLang="en-US"/>
           </a:p>
@@ -2670,7 +2676,7 @@
           <a:p>
             <a:fld id="{CDAEEA1F-7C1B-45EA-B00C-1A924196F87A}" type="datetimeFigureOut">
               <a:rPr lang="zh-TW" altLang="en-US" smtClean="0"/>
-              <a:t>2026/3/3</a:t>
+              <a:t>2026/3/4</a:t>
             </a:fld>
             <a:endParaRPr lang="zh-TW" altLang="en-US"/>
           </a:p>
@@ -2911,7 +2917,7 @@
           <a:p>
             <a:fld id="{CDAEEA1F-7C1B-45EA-B00C-1A924196F87A}" type="datetimeFigureOut">
               <a:rPr lang="zh-TW" altLang="en-US" smtClean="0"/>
-              <a:t>2026/3/3</a:t>
+              <a:t>2026/3/4</a:t>
             </a:fld>
             <a:endParaRPr lang="zh-TW" altLang="en-US"/>
           </a:p>
@@ -3896,7 +3902,7 @@
         <p:cNvPr id="1" name="">
           <a:extLst>
             <a:ext uri="{FF2B5EF4-FFF2-40B4-BE49-F238E27FC236}">
-              <a16:creationId xmlns:a16="http://schemas.microsoft.com/office/drawing/2014/main" id="{71315AC7-2F94-3BE8-773D-95E9DEEFEC2E}"/>
+              <a16:creationId xmlns:a16="http://schemas.microsoft.com/office/drawing/2014/main" id="{8CF2C0C1-4779-E5DB-DDB6-1C79BB80C128}"/>
             </a:ext>
           </a:extLst>
         </p:cNvPr>
@@ -3914,7 +3920,7 @@
     </p:spTree>
     <p:extLst>
       <p:ext uri="{BB962C8B-B14F-4D97-AF65-F5344CB8AC3E}">
-        <p14:creationId xmlns:p14="http://schemas.microsoft.com/office/powerpoint/2010/main" val="443676805"/>
+        <p14:creationId xmlns:p14="http://schemas.microsoft.com/office/powerpoint/2010/main" val="2490288751"/>
       </p:ext>
     </p:extLst>
   </p:cSld>
@@ -4274,6 +4280,72 @@
 </file>
 
 <file path=ppt/slides/slide8.xml><?xml version="1.0" encoding="utf-8"?>
+<p:sld xmlns:a="http://schemas.openxmlformats.org/drawingml/2006/main" xmlns:r="http://schemas.openxmlformats.org/officeDocument/2006/relationships" xmlns:p="http://schemas.openxmlformats.org/presentationml/2006/main">
+  <p:cSld>
+    <p:spTree>
+      <p:nvGrpSpPr>
+        <p:cNvPr id="1" name="">
+          <a:extLst>
+            <a:ext uri="{FF2B5EF4-FFF2-40B4-BE49-F238E27FC236}">
+              <a16:creationId xmlns:a16="http://schemas.microsoft.com/office/drawing/2014/main" id="{71315AC7-2F94-3BE8-773D-95E9DEEFEC2E}"/>
+            </a:ext>
+          </a:extLst>
+        </p:cNvPr>
+        <p:cNvGrpSpPr/>
+        <p:nvPr/>
+      </p:nvGrpSpPr>
+      <p:grpSpPr>
+        <a:xfrm>
+          <a:off x="0" y="0"/>
+          <a:ext cx="0" cy="0"/>
+          <a:chOff x="0" y="0"/>
+          <a:chExt cx="0" cy="0"/>
+        </a:xfrm>
+      </p:grpSpPr>
+      <p:pic>
+        <p:nvPicPr>
+          <p:cNvPr id="3" name="圖片 2">
+            <a:extLst>
+              <a:ext uri="{FF2B5EF4-FFF2-40B4-BE49-F238E27FC236}">
+                <a16:creationId xmlns:a16="http://schemas.microsoft.com/office/drawing/2014/main" id="{F91DFF72-2970-351F-F18D-A602C2C24104}"/>
+              </a:ext>
+            </a:extLst>
+          </p:cNvPr>
+          <p:cNvPicPr>
+            <a:picLocks noChangeAspect="1"/>
+          </p:cNvPicPr>
+          <p:nvPr/>
+        </p:nvPicPr>
+        <p:blipFill>
+          <a:blip r:embed="rId2"/>
+          <a:stretch>
+            <a:fillRect/>
+          </a:stretch>
+        </p:blipFill>
+        <p:spPr>
+          <a:xfrm>
+            <a:off x="399255" y="461548"/>
+            <a:ext cx="11393490" cy="5934903"/>
+          </a:xfrm>
+          <a:prstGeom prst="rect">
+            <a:avLst/>
+          </a:prstGeom>
+        </p:spPr>
+      </p:pic>
+    </p:spTree>
+    <p:extLst>
+      <p:ext uri="{BB962C8B-B14F-4D97-AF65-F5344CB8AC3E}">
+        <p14:creationId xmlns:p14="http://schemas.microsoft.com/office/powerpoint/2010/main" val="443676805"/>
+      </p:ext>
+    </p:extLst>
+  </p:cSld>
+  <p:clrMapOvr>
+    <a:masterClrMapping/>
+  </p:clrMapOvr>
+</p:sld>
+</file>
+
+<file path=ppt/slides/slide9.xml><?xml version="1.0" encoding="utf-8"?>
 <p:sld xmlns:a="http://schemas.openxmlformats.org/drawingml/2006/main" xmlns:r="http://schemas.openxmlformats.org/officeDocument/2006/relationships" xmlns:p="http://schemas.openxmlformats.org/presentationml/2006/main">
   <p:cSld>
     <p:spTree>
